--- a/courses/learn_partitioning/module02-05-spectral-partition/slides.pptx
+++ b/courses/learn_partitioning/module02-05-spectral-partition/slides.pptx
@@ -16,6 +16,9 @@
     <p:sldId id="264" r:id="rId16"/>
     <p:sldId id="265" r:id="rId17"/>
     <p:sldId id="266" r:id="rId18"/>
+    <p:sldId id="267" r:id="rId19"/>
+    <p:sldId id="268" r:id="rId20"/>
+    <p:sldId id="269" r:id="rId21"/>
   </p:sldIdLst>
   <p:sldSz cx="12191695" cy="6858000" type="screen4x3"/>
   <p:notesSz cx="6858000" cy="9144000"/>
@@ -582,7 +585,7 @@
           <a:lstStyle/>
           <a:p>
             <a:r>
-              <a:t>Common traps: optimizing cut while ignoring balance; reporting pairwise cut when the instance is a hypergraph; flipping locked terminals; and stopping before rollback to the best KL or FM prefix. For multilevel flows, verify coarsening before you blame the refiner.</a:t>
+              <a:t>In the browser lab track, open the **spectral-partition** lab from the tools shelf. Load the starter graph, run the algorithm once, and read cutsize and balance in the metrics panel. Work the challenges that lock the goldens, then come back to implement the same loop yourself.</a:t>
             </a:r>
           </a:p>
         </p:txBody>
@@ -652,6 +655,146 @@
           <a:lstStyle/>
           <a:p>
             <a:r>
+              <a:t>In the implement track, open this module's EXAMPLES.md Pseudocode section and the course common solvers. Parse the tiny graph, run the algorithm with a deterministic seed, and print the assignment plus cutsize and balance. Match the browser goldens before you claim the checklist.</a:t>
+            </a:r>
+          </a:p>
+        </p:txBody>
+      </p:sp>
+      <p:sp>
+        <p:nvSpPr>
+          <p:cNvPr id="4" name="Slide Number Placeholder 3"/>
+          <p:cNvSpPr>
+            <a:spLocks noGrp="1"/>
+          </p:cNvSpPr>
+          <p:nvPr>
+            <p:ph type="sldNum" idx="5" sz="quarter"/>
+          </p:nvPr>
+        </p:nvSpPr>
+        <p:spPr/>
+      </p:sp>
+    </p:spTree>
+  </p:cSld>
+  <p:clrMapOvr>
+    <a:masterClrMapping/>
+  </p:clrMapOvr>
+</p:notes>
+</file>
+
+<file path=ppt/notesSlides/notesSlide12.xml><?xml version="1.0" encoding="utf-8"?>
+<p:notes xmlns:a="http://schemas.openxmlformats.org/drawingml/2006/main" xmlns:p="http://schemas.openxmlformats.org/presentationml/2006/main" xmlns:r="http://schemas.openxmlformats.org/officeDocument/2006/relationships">
+  <p:cSld>
+    <p:spTree>
+      <p:nvGrpSpPr>
+        <p:cNvPr id="1" name=""/>
+        <p:cNvGrpSpPr/>
+        <p:nvPr/>
+      </p:nvGrpSpPr>
+      <p:grpSpPr>
+        <a:xfrm>
+          <a:off x="0" y="0"/>
+          <a:ext cx="0" cy="0"/>
+          <a:chOff x="0" y="0"/>
+          <a:chExt cx="0" cy="0"/>
+        </a:xfrm>
+      </p:grpSpPr>
+      <p:sp>
+        <p:nvSpPr>
+          <p:cNvPr id="2" name="Slide Image Placeholder 1"/>
+          <p:cNvSpPr>
+            <a:spLocks noGrp="1"/>
+          </p:cNvSpPr>
+          <p:nvPr>
+            <p:ph type="sldImg" idx="2"/>
+          </p:nvPr>
+        </p:nvSpPr>
+        <p:spPr/>
+      </p:sp>
+      <p:sp>
+        <p:nvSpPr>
+          <p:cNvPr id="3" name="Notes Placeholder 2"/>
+          <p:cNvSpPr>
+            <a:spLocks noGrp="1"/>
+          </p:cNvSpPr>
+          <p:nvPr>
+            <p:ph type="body" idx="3" sz="quarter"/>
+          </p:nvPr>
+        </p:nvSpPr>
+        <p:spPr/>
+        <p:txBody>
+          <a:bodyPr/>
+          <a:lstStyle/>
+          <a:p>
+            <a:r>
+              <a:t>Common traps: optimizing cut while ignoring balance; reporting pairwise cut when the instance is a hypergraph; flipping locked terminals; and stopping before rollback to the best KL or FM prefix. For multilevel flows, verify coarsening before you blame the refiner.</a:t>
+            </a:r>
+          </a:p>
+        </p:txBody>
+      </p:sp>
+      <p:sp>
+        <p:nvSpPr>
+          <p:cNvPr id="4" name="Slide Number Placeholder 3"/>
+          <p:cNvSpPr>
+            <a:spLocks noGrp="1"/>
+          </p:cNvSpPr>
+          <p:nvPr>
+            <p:ph type="sldNum" idx="5" sz="quarter"/>
+          </p:nvPr>
+        </p:nvSpPr>
+        <p:spPr/>
+      </p:sp>
+    </p:spTree>
+  </p:cSld>
+  <p:clrMapOvr>
+    <a:masterClrMapping/>
+  </p:clrMapOvr>
+</p:notes>
+</file>
+
+<file path=ppt/notesSlides/notesSlide13.xml><?xml version="1.0" encoding="utf-8"?>
+<p:notes xmlns:a="http://schemas.openxmlformats.org/drawingml/2006/main" xmlns:p="http://schemas.openxmlformats.org/presentationml/2006/main" xmlns:r="http://schemas.openxmlformats.org/officeDocument/2006/relationships">
+  <p:cSld>
+    <p:spTree>
+      <p:nvGrpSpPr>
+        <p:cNvPr id="1" name=""/>
+        <p:cNvGrpSpPr/>
+        <p:nvPr/>
+      </p:nvGrpSpPr>
+      <p:grpSpPr>
+        <a:xfrm>
+          <a:off x="0" y="0"/>
+          <a:ext cx="0" cy="0"/>
+          <a:chOff x="0" y="0"/>
+          <a:chExt cx="0" cy="0"/>
+        </a:xfrm>
+      </p:grpSpPr>
+      <p:sp>
+        <p:nvSpPr>
+          <p:cNvPr id="2" name="Slide Image Placeholder 1"/>
+          <p:cNvSpPr>
+            <a:spLocks noGrp="1"/>
+          </p:cNvSpPr>
+          <p:nvPr>
+            <p:ph type="sldImg" idx="2"/>
+          </p:nvPr>
+        </p:nvSpPr>
+        <p:spPr/>
+      </p:sp>
+      <p:sp>
+        <p:nvSpPr>
+          <p:cNvPr id="3" name="Notes Placeholder 2"/>
+          <p:cNvSpPr>
+            <a:spLocks noGrp="1"/>
+          </p:cNvSpPr>
+          <p:nvPr>
+            <p:ph type="body" idx="3" sz="quarter"/>
+          </p:nvPr>
+        </p:nvSpPr>
+        <p:spPr/>
+        <p:txBody>
+          <a:bodyPr/>
+          <a:lstStyle/>
+          <a:p>
+            <a:r>
               <a:t>Complete the checklist for at least one track—preferably both. Implement until your metrics match the starter goldens. When you’re ready, take the short quiz, then continue to the next module.</a:t>
             </a:r>
           </a:p>
@@ -725,12 +868,6 @@
               <a:t>Build L equals D minus A, take the second eigenvector, sort nodes, and try balanced prefixes. Reject lopsided splits. The continuous membership becomes a hard bipartition only after the sweep chooses the best legal cut.</a:t>
             </a:r>
           </a:p>
-          <a:p/>
-          <a:p>
-            <a:r>
-              <a:t>&lt;!-- algorithm-walkthrough --&gt;</a:t>
-            </a:r>
-          </a:p>
         </p:txBody>
       </p:sp>
       <p:sp>
@@ -798,7 +935,13 @@
           <a:lstStyle/>
           <a:p>
             <a:r>
-              <a:t>Spectral methods read connectivity from the graph Laplacian L = D − A. The Fiedler vector (second eigenvector) encodes a soft cut.</a:t>
+              <a:t>Spectral bipartition reads the Fiedler vector of the Laplacian, sorts nodes, then sweeps balanced prefixes for the cheapest cut.</a:t>
+            </a:r>
+          </a:p>
+          <a:p/>
+          <a:p>
+            <a:r>
+              <a:t>Open this module's examples file and find the Pseudocode section. That written sketch is what you implement on the implement track and what the browser challenges measure.</a:t>
             </a:r>
           </a:p>
         </p:txBody>
@@ -868,7 +1011,7 @@
           <a:lstStyle/>
           <a:p>
             <a:r>
-              <a:t>After iteration, nodes order low→high as E, D, C, B, A. E is most negative; A is most positive — natural bipartition candidates.</a:t>
+              <a:t>On the starter graph the winning split is D E versus A B C with cutsize three—the same golden communities KL and FM refine toward.</a:t>
             </a:r>
           </a:p>
         </p:txBody>
@@ -938,7 +1081,7 @@
           <a:lstStyle/>
           <a:p>
             <a:r>
-              <a:t>Try every balanced prefix of the order as side 0. The winning split is {D,E} vs {A,B,C} with cutsize 3.</a:t>
+              <a:t>Spectral methods read connectivity from the graph Laplacian L = D − A. The Fiedler vector (second eigenvector) encodes a soft cut.</a:t>
             </a:r>
           </a:p>
         </p:txBody>
@@ -1008,7 +1151,7 @@
           <a:lstStyle/>
           <a:p>
             <a:r>
-              <a:t>Spectral recovers the same communities as unconstrained greedy and grow-from-D. Global eigenvectors find the cut without greedy merges.</a:t>
+              <a:t>After iteration, nodes order low→high as E, D, C, B, A. E is most negative; A is most positive — natural bipartition candidates.</a:t>
             </a:r>
           </a:p>
         </p:txBody>
@@ -1078,13 +1221,7 @@
           <a:lstStyle/>
           <a:p>
             <a:r>
-              <a:t>Spectral is a strong initializer for bipartition. On larger chips it pairs with multilevel; here the tiny instance grades against golden cut 3.</a:t>
-            </a:r>
-          </a:p>
-          <a:p/>
-          <a:p>
-            <a:r>
-              <a:t>&lt;!-- /algorithm-walkthrough --&gt;</a:t>
+              <a:t>Try every balanced prefix of the order as side 0. The winning split is {D,E} vs {A,B,C} with cutsize 3.</a:t>
             </a:r>
           </a:p>
         </p:txBody>
@@ -1154,7 +1291,7 @@
           <a:lstStyle/>
           <a:p>
             <a:r>
-              <a:t>In the browser lab track, open the **spectral-partition** lab from the tools shelf. Load the starter graph, run the algorithm once, and read cutsize and balance in the metrics panel. Work the challenges that lock the goldens, then come back to implement the same loop yourself.</a:t>
+              <a:t>Spectral recovers the same communities as unconstrained greedy and grow-from-D. Global eigenvectors find the cut without greedy merges.</a:t>
             </a:r>
           </a:p>
         </p:txBody>
@@ -1224,7 +1361,7 @@
           <a:lstStyle/>
           <a:p>
             <a:r>
-              <a:t>In the implement track, open this module’s examples and the course `common/` solvers. Parse the tiny graph, run the algorithm with a deterministic seed, and print the assignment plus cutsize and balance. Match the browser goldens before you claim the checklist.</a:t>
+              <a:t>Spectral is a strong initializer for bipartition. On larger chips it pairs with multilevel; here the tiny instance grades against golden cut 3.</a:t>
             </a:r>
           </a:p>
         </p:txBody>
@@ -4382,21 +4519,45 @@
                 </a:solidFill>
                 <a:latin typeface="Calibri"/>
               </a:rPr>
-              <a:t>Pitfalls</a:t>
-            </a:r>
-          </a:p>
-        </p:txBody>
-      </p:sp>
-      <p:sp>
-        <p:nvSpPr>
-          <p:cNvPr id="3" name="TextBox 2"/>
+              <a:t>When spectral helps</a:t>
+            </a:r>
+          </a:p>
+        </p:txBody>
+      </p:sp>
+      <p:pic>
+        <p:nvPicPr>
+          <p:cNvPr id="3" name="Picture 2" descr="05-takeaway.png"/>
+          <p:cNvPicPr>
+            <a:picLocks noChangeAspect="1"/>
+          </p:cNvPicPr>
+          <p:nvPr/>
+        </p:nvPicPr>
+        <p:blipFill>
+          <a:blip r:embed="rId2"/>
+          <a:stretch>
+            <a:fillRect/>
+          </a:stretch>
+        </p:blipFill>
+        <p:spPr>
+          <a:xfrm>
+            <a:off x="548640" y="1143000"/>
+            <a:ext cx="9404113" cy="4572000"/>
+          </a:xfrm>
+          <a:prstGeom prst="rect">
+            <a:avLst/>
+          </a:prstGeom>
+        </p:spPr>
+      </p:pic>
+      <p:sp>
+        <p:nvSpPr>
+          <p:cNvPr id="4" name="TextBox 3"/>
           <p:cNvSpPr txBox="1"/>
           <p:nvPr/>
         </p:nvSpPr>
         <p:spPr>
           <a:xfrm>
-            <a:off x="548640" y="1234440"/>
-            <a:ext cx="11064240" cy="4937760"/>
+            <a:off x="548640" y="5897880"/>
+            <a:ext cx="11064240" cy="411480"/>
           </a:xfrm>
           <a:prstGeom prst="rect">
             <a:avLst/>
@@ -4409,54 +4570,26 @@
           </a:bodyPr>
           <a:lstStyle/>
           <a:p>
-            <a:pPr lvl="0" marL="457200" indent="-228600">
-              <a:buFont typeface="Calibri"/>
-              <a:spcAft>
-                <a:spcPts val="1000"/>
-              </a:spcAft>
-              <a:buSzPct val="100000"/>
-              <a:buChar char="•"/>
+            <a:pPr>
               <a:lnSpc>
                 <a:spcPts val="2200"/>
               </a:lnSpc>
             </a:pPr>
             <a:r>
-              <a:rPr sz="2000" b="0">
+              <a:rPr sz="1200" b="0">
                 <a:solidFill>
                   <a:srgbClr val="333333"/>
                 </a:solidFill>
                 <a:latin typeface="Calibri"/>
               </a:rPr>
-              <a:t>Common traps</a:t>
-            </a:r>
-          </a:p>
-          <a:p>
-            <a:pPr lvl="0" marL="457200" indent="-228600">
-              <a:buFont typeface="Calibri"/>
-              <a:spcAft>
-                <a:spcPts val="1000"/>
-              </a:spcAft>
-              <a:buSzPct val="100000"/>
-              <a:buChar char="•"/>
-              <a:lnSpc>
-                <a:spcPts val="2200"/>
-              </a:lnSpc>
-            </a:pPr>
-            <a:r>
-              <a:rPr sz="2000" b="0">
-                <a:solidFill>
-                  <a:srgbClr val="333333"/>
-                </a:solidFill>
-                <a:latin typeface="Calibri"/>
-              </a:rPr>
-              <a:t>For multilevel flows, verify coarsening before you blame the refiner</a:t>
-            </a:r>
-          </a:p>
-        </p:txBody>
-      </p:sp>
-      <p:sp>
-        <p:nvSpPr>
-          <p:cNvPr id="4" name="TextBox 3"/>
+              <a:t>When spectral helps</a:t>
+            </a:r>
+          </a:p>
+        </p:txBody>
+      </p:sp>
+      <p:sp>
+        <p:nvSpPr>
+          <p:cNvPr id="5" name="TextBox 4"/>
           <p:cNvSpPr txBox="1"/>
           <p:nvPr/>
         </p:nvSpPr>
@@ -4545,6 +4678,557 @@
                 </a:solidFill>
                 <a:latin typeface="Calibri"/>
               </a:rPr>
+              <a:t>Browser lab track</a:t>
+            </a:r>
+          </a:p>
+        </p:txBody>
+      </p:sp>
+      <p:sp>
+        <p:nvSpPr>
+          <p:cNvPr id="3" name="TextBox 2"/>
+          <p:cNvSpPr txBox="1"/>
+          <p:nvPr/>
+        </p:nvSpPr>
+        <p:spPr>
+          <a:xfrm>
+            <a:off x="548640" y="1234440"/>
+            <a:ext cx="11064240" cy="4937760"/>
+          </a:xfrm>
+          <a:prstGeom prst="rect">
+            <a:avLst/>
+          </a:prstGeom>
+          <a:noFill/>
+        </p:spPr>
+        <p:txBody>
+          <a:bodyPr wrap="square">
+            <a:noAutofit/>
+          </a:bodyPr>
+          <a:lstStyle/>
+          <a:p>
+            <a:pPr lvl="0" marL="457200" indent="-228600">
+              <a:buFont typeface="Calibri"/>
+              <a:spcAft>
+                <a:spcPts val="1000"/>
+              </a:spcAft>
+              <a:buSzPct val="100000"/>
+              <a:buChar char="•"/>
+              <a:lnSpc>
+                <a:spcPts val="2200"/>
+              </a:lnSpc>
+            </a:pPr>
+            <a:r>
+              <a:rPr sz="2000" b="0">
+                <a:solidFill>
+                  <a:srgbClr val="333333"/>
+                </a:solidFill>
+                <a:latin typeface="Calibri"/>
+              </a:rPr>
+              <a:t>In the browser lab track, open the </a:t>
+            </a:r>
+            <a:r>
+              <a:rPr sz="2000" b="1">
+                <a:solidFill>
+                  <a:srgbClr val="333333"/>
+                </a:solidFill>
+                <a:latin typeface="Calibri"/>
+              </a:rPr>
+              <a:t>spectral-partition</a:t>
+            </a:r>
+            <a:r>
+              <a:rPr sz="2000" b="0">
+                <a:solidFill>
+                  <a:srgbClr val="333333"/>
+                </a:solidFill>
+                <a:latin typeface="Calibri"/>
+              </a:rPr>
+              <a:t> lab from the tools shelf</a:t>
+            </a:r>
+          </a:p>
+          <a:p>
+            <a:pPr lvl="0" marL="457200" indent="-228600">
+              <a:buFont typeface="Calibri"/>
+              <a:spcAft>
+                <a:spcPts val="1000"/>
+              </a:spcAft>
+              <a:buSzPct val="100000"/>
+              <a:buChar char="•"/>
+              <a:lnSpc>
+                <a:spcPts val="2200"/>
+              </a:lnSpc>
+            </a:pPr>
+            <a:r>
+              <a:rPr sz="2000" b="0">
+                <a:solidFill>
+                  <a:srgbClr val="333333"/>
+                </a:solidFill>
+                <a:latin typeface="Calibri"/>
+              </a:rPr>
+              <a:t>Load the starter graph, run the algorithm once</a:t>
+            </a:r>
+          </a:p>
+          <a:p>
+            <a:pPr lvl="0" marL="457200" indent="-228600">
+              <a:buFont typeface="Calibri"/>
+              <a:spcAft>
+                <a:spcPts val="1000"/>
+              </a:spcAft>
+              <a:buSzPct val="100000"/>
+              <a:buChar char="•"/>
+              <a:lnSpc>
+                <a:spcPts val="2200"/>
+              </a:lnSpc>
+            </a:pPr>
+            <a:r>
+              <a:rPr sz="2000" b="0">
+                <a:solidFill>
+                  <a:srgbClr val="333333"/>
+                </a:solidFill>
+                <a:latin typeface="Calibri"/>
+              </a:rPr>
+              <a:t>Work the challenges that lock the goldens</a:t>
+            </a:r>
+          </a:p>
+        </p:txBody>
+      </p:sp>
+      <p:sp>
+        <p:nvSpPr>
+          <p:cNvPr id="4" name="TextBox 3"/>
+          <p:cNvSpPr txBox="1"/>
+          <p:nvPr/>
+        </p:nvSpPr>
+        <p:spPr>
+          <a:xfrm>
+            <a:off x="548640" y="6355080"/>
+            <a:ext cx="11064240" cy="320040"/>
+          </a:xfrm>
+          <a:prstGeom prst="rect">
+            <a:avLst/>
+          </a:prstGeom>
+          <a:noFill/>
+        </p:spPr>
+        <p:txBody>
+          <a:bodyPr wrap="square">
+            <a:noAutofit/>
+          </a:bodyPr>
+          <a:lstStyle/>
+          <a:p>
+            <a:pPr algn="r">
+              <a:lnSpc>
+                <a:spcPts val="2200"/>
+              </a:lnSpc>
+              <a:defRPr sz="1000" b="0">
+                <a:solidFill>
+                  <a:srgbClr val="666666"/>
+                </a:solidFill>
+                <a:latin typeface="Calibri"/>
+              </a:defRPr>
+            </a:pPr>
+            <a:r>
+              <a:t>learn_partitioning — 05 spectral partition</a:t>
+            </a:r>
+          </a:p>
+        </p:txBody>
+      </p:sp>
+    </p:spTree>
+  </p:cSld>
+  <p:clrMapOvr>
+    <a:masterClrMapping/>
+  </p:clrMapOvr>
+</p:sld>
+</file>
+
+<file path=ppt/slides/slide12.xml><?xml version="1.0" encoding="utf-8"?>
+<p:sld xmlns:a="http://schemas.openxmlformats.org/drawingml/2006/main" xmlns:p="http://schemas.openxmlformats.org/presentationml/2006/main" xmlns:r="http://schemas.openxmlformats.org/officeDocument/2006/relationships">
+  <p:cSld>
+    <p:spTree>
+      <p:nvGrpSpPr>
+        <p:cNvPr id="1" name=""/>
+        <p:cNvGrpSpPr/>
+        <p:nvPr/>
+      </p:nvGrpSpPr>
+      <p:grpSpPr/>
+      <p:sp>
+        <p:nvSpPr>
+          <p:cNvPr id="2" name="TextBox 1"/>
+          <p:cNvSpPr txBox="1"/>
+          <p:nvPr/>
+        </p:nvSpPr>
+        <p:spPr>
+          <a:xfrm>
+            <a:off x="548640" y="411480"/>
+            <a:ext cx="11064240" cy="777240"/>
+          </a:xfrm>
+          <a:prstGeom prst="rect">
+            <a:avLst/>
+          </a:prstGeom>
+          <a:noFill/>
+        </p:spPr>
+        <p:txBody>
+          <a:bodyPr wrap="square">
+            <a:noAutofit/>
+          </a:bodyPr>
+          <a:lstStyle/>
+          <a:p>
+            <a:pPr>
+              <a:lnSpc>
+                <a:spcPts val="2200"/>
+              </a:lnSpc>
+            </a:pPr>
+            <a:r>
+              <a:rPr sz="2800" b="1">
+                <a:solidFill>
+                  <a:srgbClr val="1A1A2E"/>
+                </a:solidFill>
+                <a:latin typeface="Calibri"/>
+              </a:rPr>
+              <a:t>Implement track</a:t>
+            </a:r>
+          </a:p>
+        </p:txBody>
+      </p:sp>
+      <p:sp>
+        <p:nvSpPr>
+          <p:cNvPr id="3" name="TextBox 2"/>
+          <p:cNvSpPr txBox="1"/>
+          <p:nvPr/>
+        </p:nvSpPr>
+        <p:spPr>
+          <a:xfrm>
+            <a:off x="548640" y="1234440"/>
+            <a:ext cx="11064240" cy="4937760"/>
+          </a:xfrm>
+          <a:prstGeom prst="rect">
+            <a:avLst/>
+          </a:prstGeom>
+          <a:noFill/>
+        </p:spPr>
+        <p:txBody>
+          <a:bodyPr wrap="square">
+            <a:noAutofit/>
+          </a:bodyPr>
+          <a:lstStyle/>
+          <a:p>
+            <a:pPr lvl="0" marL="457200" indent="-228600">
+              <a:buFont typeface="Calibri"/>
+              <a:spcAft>
+                <a:spcPts val="1000"/>
+              </a:spcAft>
+              <a:buSzPct val="100000"/>
+              <a:buChar char="•"/>
+              <a:lnSpc>
+                <a:spcPts val="2200"/>
+              </a:lnSpc>
+            </a:pPr>
+            <a:r>
+              <a:rPr sz="2000" b="0">
+                <a:solidFill>
+                  <a:srgbClr val="333333"/>
+                </a:solidFill>
+                <a:latin typeface="Calibri"/>
+              </a:rPr>
+              <a:t>In the implement track</a:t>
+            </a:r>
+          </a:p>
+          <a:p>
+            <a:pPr lvl="0" marL="457200" indent="-228600">
+              <a:buFont typeface="Calibri"/>
+              <a:spcAft>
+                <a:spcPts val="1000"/>
+              </a:spcAft>
+              <a:buSzPct val="100000"/>
+              <a:buChar char="•"/>
+              <a:lnSpc>
+                <a:spcPts val="2200"/>
+              </a:lnSpc>
+            </a:pPr>
+            <a:r>
+              <a:rPr sz="2000" b="0">
+                <a:solidFill>
+                  <a:srgbClr val="333333"/>
+                </a:solidFill>
+                <a:latin typeface="Calibri"/>
+              </a:rPr>
+              <a:t>Parse the tiny graph, run the algorithm with a deterministic seed</a:t>
+            </a:r>
+          </a:p>
+          <a:p>
+            <a:pPr lvl="0" marL="457200" indent="-228600">
+              <a:buFont typeface="Calibri"/>
+              <a:spcAft>
+                <a:spcPts val="1000"/>
+              </a:spcAft>
+              <a:buSzPct val="100000"/>
+              <a:buChar char="•"/>
+              <a:lnSpc>
+                <a:spcPts val="2200"/>
+              </a:lnSpc>
+            </a:pPr>
+            <a:r>
+              <a:rPr sz="2000" b="0">
+                <a:solidFill>
+                  <a:srgbClr val="333333"/>
+                </a:solidFill>
+                <a:latin typeface="Calibri"/>
+              </a:rPr>
+              <a:t>Match the browser goldens before you claim the checklist</a:t>
+            </a:r>
+          </a:p>
+        </p:txBody>
+      </p:sp>
+      <p:sp>
+        <p:nvSpPr>
+          <p:cNvPr id="4" name="TextBox 3"/>
+          <p:cNvSpPr txBox="1"/>
+          <p:nvPr/>
+        </p:nvSpPr>
+        <p:spPr>
+          <a:xfrm>
+            <a:off x="548640" y="6355080"/>
+            <a:ext cx="11064240" cy="320040"/>
+          </a:xfrm>
+          <a:prstGeom prst="rect">
+            <a:avLst/>
+          </a:prstGeom>
+          <a:noFill/>
+        </p:spPr>
+        <p:txBody>
+          <a:bodyPr wrap="square">
+            <a:noAutofit/>
+          </a:bodyPr>
+          <a:lstStyle/>
+          <a:p>
+            <a:pPr algn="r">
+              <a:lnSpc>
+                <a:spcPts val="2200"/>
+              </a:lnSpc>
+              <a:defRPr sz="1000" b="0">
+                <a:solidFill>
+                  <a:srgbClr val="666666"/>
+                </a:solidFill>
+                <a:latin typeface="Calibri"/>
+              </a:defRPr>
+            </a:pPr>
+            <a:r>
+              <a:t>learn_partitioning — 05 spectral partition</a:t>
+            </a:r>
+          </a:p>
+        </p:txBody>
+      </p:sp>
+    </p:spTree>
+  </p:cSld>
+  <p:clrMapOvr>
+    <a:masterClrMapping/>
+  </p:clrMapOvr>
+</p:sld>
+</file>
+
+<file path=ppt/slides/slide13.xml><?xml version="1.0" encoding="utf-8"?>
+<p:sld xmlns:a="http://schemas.openxmlformats.org/drawingml/2006/main" xmlns:p="http://schemas.openxmlformats.org/presentationml/2006/main" xmlns:r="http://schemas.openxmlformats.org/officeDocument/2006/relationships">
+  <p:cSld>
+    <p:spTree>
+      <p:nvGrpSpPr>
+        <p:cNvPr id="1" name=""/>
+        <p:cNvGrpSpPr/>
+        <p:nvPr/>
+      </p:nvGrpSpPr>
+      <p:grpSpPr/>
+      <p:sp>
+        <p:nvSpPr>
+          <p:cNvPr id="2" name="TextBox 1"/>
+          <p:cNvSpPr txBox="1"/>
+          <p:nvPr/>
+        </p:nvSpPr>
+        <p:spPr>
+          <a:xfrm>
+            <a:off x="548640" y="411480"/>
+            <a:ext cx="11064240" cy="777240"/>
+          </a:xfrm>
+          <a:prstGeom prst="rect">
+            <a:avLst/>
+          </a:prstGeom>
+          <a:noFill/>
+        </p:spPr>
+        <p:txBody>
+          <a:bodyPr wrap="square">
+            <a:noAutofit/>
+          </a:bodyPr>
+          <a:lstStyle/>
+          <a:p>
+            <a:pPr>
+              <a:lnSpc>
+                <a:spcPts val="2200"/>
+              </a:lnSpc>
+            </a:pPr>
+            <a:r>
+              <a:rPr sz="2800" b="1">
+                <a:solidFill>
+                  <a:srgbClr val="1A1A2E"/>
+                </a:solidFill>
+                <a:latin typeface="Calibri"/>
+              </a:rPr>
+              <a:t>Pitfalls</a:t>
+            </a:r>
+          </a:p>
+        </p:txBody>
+      </p:sp>
+      <p:sp>
+        <p:nvSpPr>
+          <p:cNvPr id="3" name="TextBox 2"/>
+          <p:cNvSpPr txBox="1"/>
+          <p:nvPr/>
+        </p:nvSpPr>
+        <p:spPr>
+          <a:xfrm>
+            <a:off x="548640" y="1234440"/>
+            <a:ext cx="11064240" cy="4937760"/>
+          </a:xfrm>
+          <a:prstGeom prst="rect">
+            <a:avLst/>
+          </a:prstGeom>
+          <a:noFill/>
+        </p:spPr>
+        <p:txBody>
+          <a:bodyPr wrap="square">
+            <a:noAutofit/>
+          </a:bodyPr>
+          <a:lstStyle/>
+          <a:p>
+            <a:pPr lvl="0" marL="457200" indent="-228600">
+              <a:buFont typeface="Calibri"/>
+              <a:spcAft>
+                <a:spcPts val="1000"/>
+              </a:spcAft>
+              <a:buSzPct val="100000"/>
+              <a:buChar char="•"/>
+              <a:lnSpc>
+                <a:spcPts val="2200"/>
+              </a:lnSpc>
+            </a:pPr>
+            <a:r>
+              <a:rPr sz="2000" b="0">
+                <a:solidFill>
+                  <a:srgbClr val="333333"/>
+                </a:solidFill>
+                <a:latin typeface="Calibri"/>
+              </a:rPr>
+              <a:t>Common traps</a:t>
+            </a:r>
+          </a:p>
+          <a:p>
+            <a:pPr lvl="0" marL="457200" indent="-228600">
+              <a:buFont typeface="Calibri"/>
+              <a:spcAft>
+                <a:spcPts val="1000"/>
+              </a:spcAft>
+              <a:buSzPct val="100000"/>
+              <a:buChar char="•"/>
+              <a:lnSpc>
+                <a:spcPts val="2200"/>
+              </a:lnSpc>
+            </a:pPr>
+            <a:r>
+              <a:rPr sz="2000" b="0">
+                <a:solidFill>
+                  <a:srgbClr val="333333"/>
+                </a:solidFill>
+                <a:latin typeface="Calibri"/>
+              </a:rPr>
+              <a:t>For multilevel flows, verify coarsening before you blame the refiner</a:t>
+            </a:r>
+          </a:p>
+        </p:txBody>
+      </p:sp>
+      <p:sp>
+        <p:nvSpPr>
+          <p:cNvPr id="4" name="TextBox 3"/>
+          <p:cNvSpPr txBox="1"/>
+          <p:nvPr/>
+        </p:nvSpPr>
+        <p:spPr>
+          <a:xfrm>
+            <a:off x="548640" y="6355080"/>
+            <a:ext cx="11064240" cy="320040"/>
+          </a:xfrm>
+          <a:prstGeom prst="rect">
+            <a:avLst/>
+          </a:prstGeom>
+          <a:noFill/>
+        </p:spPr>
+        <p:txBody>
+          <a:bodyPr wrap="square">
+            <a:noAutofit/>
+          </a:bodyPr>
+          <a:lstStyle/>
+          <a:p>
+            <a:pPr algn="r">
+              <a:lnSpc>
+                <a:spcPts val="2200"/>
+              </a:lnSpc>
+              <a:defRPr sz="1000" b="0">
+                <a:solidFill>
+                  <a:srgbClr val="666666"/>
+                </a:solidFill>
+                <a:latin typeface="Calibri"/>
+              </a:defRPr>
+            </a:pPr>
+            <a:r>
+              <a:t>learn_partitioning — 05 spectral partition</a:t>
+            </a:r>
+          </a:p>
+        </p:txBody>
+      </p:sp>
+    </p:spTree>
+  </p:cSld>
+  <p:clrMapOvr>
+    <a:masterClrMapping/>
+  </p:clrMapOvr>
+</p:sld>
+</file>
+
+<file path=ppt/slides/slide14.xml><?xml version="1.0" encoding="utf-8"?>
+<p:sld xmlns:a="http://schemas.openxmlformats.org/drawingml/2006/main" xmlns:p="http://schemas.openxmlformats.org/presentationml/2006/main" xmlns:r="http://schemas.openxmlformats.org/officeDocument/2006/relationships">
+  <p:cSld>
+    <p:spTree>
+      <p:nvGrpSpPr>
+        <p:cNvPr id="1" name=""/>
+        <p:cNvGrpSpPr/>
+        <p:nvPr/>
+      </p:nvGrpSpPr>
+      <p:grpSpPr/>
+      <p:sp>
+        <p:nvSpPr>
+          <p:cNvPr id="2" name="TextBox 1"/>
+          <p:cNvSpPr txBox="1"/>
+          <p:nvPr/>
+        </p:nvSpPr>
+        <p:spPr>
+          <a:xfrm>
+            <a:off x="548640" y="411480"/>
+            <a:ext cx="11064240" cy="777240"/>
+          </a:xfrm>
+          <a:prstGeom prst="rect">
+            <a:avLst/>
+          </a:prstGeom>
+          <a:noFill/>
+        </p:spPr>
+        <p:txBody>
+          <a:bodyPr wrap="square">
+            <a:noAutofit/>
+          </a:bodyPr>
+          <a:lstStyle/>
+          <a:p>
+            <a:pPr>
+              <a:lnSpc>
+                <a:spcPts val="2200"/>
+              </a:lnSpc>
+            </a:pPr>
+            <a:r>
+              <a:rPr sz="2800" b="1">
+                <a:solidFill>
+                  <a:srgbClr val="1A1A2E"/>
+                </a:solidFill>
+                <a:latin typeface="Calibri"/>
+              </a:rPr>
               <a:t>Your turn</a:t>
             </a:r>
           </a:p>
@@ -4822,28 +5506,6 @@
               <a:t>The continuous membership becomes a hard bipartition only after the sweep chooses the best</a:t>
             </a:r>
           </a:p>
-          <a:p>
-            <a:pPr lvl="0" marL="457200" indent="-228600">
-              <a:buFont typeface="Calibri"/>
-              <a:spcAft>
-                <a:spcPts val="1000"/>
-              </a:spcAft>
-              <a:buSzPct val="100000"/>
-              <a:buChar char="•"/>
-              <a:lnSpc>
-                <a:spcPts val="2200"/>
-              </a:lnSpc>
-            </a:pPr>
-            <a:r>
-              <a:rPr sz="2000" b="0">
-                <a:solidFill>
-                  <a:srgbClr val="333333"/>
-                </a:solidFill>
-                <a:latin typeface="Calibri"/>
-              </a:rPr>
-              <a:t>&lt;!-- algorithm-walkthrough --&gt;</a:t>
-            </a:r>
-          </a:p>
         </p:txBody>
       </p:sp>
       <p:sp>
@@ -4937,45 +5599,21 @@
                 </a:solidFill>
                 <a:latin typeface="Calibri"/>
               </a:rPr>
-              <a:t>Build the Laplacian</a:t>
-            </a:r>
-          </a:p>
-        </p:txBody>
-      </p:sp>
-      <p:pic>
-        <p:nvPicPr>
-          <p:cNvPr id="3" name="Picture 2" descr="01-laplacian.png"/>
-          <p:cNvPicPr>
-            <a:picLocks noChangeAspect="1"/>
-          </p:cNvPicPr>
-          <p:nvPr/>
-        </p:nvPicPr>
-        <p:blipFill>
-          <a:blip r:embed="rId2"/>
-          <a:stretch>
-            <a:fillRect/>
-          </a:stretch>
-        </p:blipFill>
-        <p:spPr>
-          <a:xfrm>
-            <a:off x="548640" y="1143000"/>
-            <a:ext cx="9404113" cy="4572000"/>
-          </a:xfrm>
-          <a:prstGeom prst="rect">
-            <a:avLst/>
-          </a:prstGeom>
-        </p:spPr>
-      </p:pic>
-      <p:sp>
-        <p:nvSpPr>
-          <p:cNvPr id="4" name="TextBox 3"/>
+              <a:t>Pseudocode</a:t>
+            </a:r>
+          </a:p>
+        </p:txBody>
+      </p:sp>
+      <p:sp>
+        <p:nvSpPr>
+          <p:cNvPr id="3" name="TextBox 2"/>
           <p:cNvSpPr txBox="1"/>
           <p:nvPr/>
         </p:nvSpPr>
         <p:spPr>
           <a:xfrm>
-            <a:off x="548640" y="5897880"/>
-            <a:ext cx="11064240" cy="411480"/>
+            <a:off x="548640" y="1234440"/>
+            <a:ext cx="11064240" cy="4937760"/>
           </a:xfrm>
           <a:prstGeom prst="rect">
             <a:avLst/>
@@ -4988,26 +5626,76 @@
           </a:bodyPr>
           <a:lstStyle/>
           <a:p>
-            <a:pPr>
+            <a:pPr lvl="0" marL="457200" indent="-228600">
+              <a:buFont typeface="Calibri"/>
+              <a:spcAft>
+                <a:spcPts val="1000"/>
+              </a:spcAft>
+              <a:buSzPct val="100000"/>
+              <a:buChar char="•"/>
               <a:lnSpc>
                 <a:spcPts val="2200"/>
               </a:lnSpc>
             </a:pPr>
             <a:r>
-              <a:rPr sz="1200" b="0">
+              <a:rPr sz="2000" b="0">
                 <a:solidFill>
                   <a:srgbClr val="333333"/>
                 </a:solidFill>
                 <a:latin typeface="Calibri"/>
               </a:rPr>
-              <a:t>Build the Laplacian</a:t>
-            </a:r>
-          </a:p>
-        </p:txBody>
-      </p:sp>
-      <p:sp>
-        <p:nvSpPr>
-          <p:cNvPr id="5" name="TextBox 4"/>
+              <a:t>Spectral bipartition reads the Fiedler vector of the Laplacian</a:t>
+            </a:r>
+          </a:p>
+          <a:p>
+            <a:pPr lvl="0" marL="457200" indent="-228600">
+              <a:buFont typeface="Calibri"/>
+              <a:spcAft>
+                <a:spcPts val="1000"/>
+              </a:spcAft>
+              <a:buSzPct val="100000"/>
+              <a:buChar char="•"/>
+              <a:lnSpc>
+                <a:spcPts val="2200"/>
+              </a:lnSpc>
+            </a:pPr>
+            <a:r>
+              <a:rPr sz="2000" b="0">
+                <a:solidFill>
+                  <a:srgbClr val="333333"/>
+                </a:solidFill>
+                <a:latin typeface="Calibri"/>
+              </a:rPr>
+              <a:t>Open this module's examples file and find the Pseudocode section</a:t>
+            </a:r>
+          </a:p>
+          <a:p>
+            <a:pPr lvl="0" marL="457200" indent="-228600">
+              <a:buFont typeface="Calibri"/>
+              <a:spcAft>
+                <a:spcPts val="1000"/>
+              </a:spcAft>
+              <a:buSzPct val="100000"/>
+              <a:buChar char="•"/>
+              <a:lnSpc>
+                <a:spcPts val="2200"/>
+              </a:lnSpc>
+            </a:pPr>
+            <a:r>
+              <a:rPr sz="2000" b="0">
+                <a:solidFill>
+                  <a:srgbClr val="333333"/>
+                </a:solidFill>
+                <a:latin typeface="Calibri"/>
+              </a:rPr>
+              <a:t>That written sketch is what you implement on the implement track and what the browser</a:t>
+            </a:r>
+          </a:p>
+        </p:txBody>
+      </p:sp>
+      <p:sp>
+        <p:nvSpPr>
+          <p:cNvPr id="4" name="TextBox 3"/>
           <p:cNvSpPr txBox="1"/>
           <p:nvPr/>
         </p:nvSpPr>
@@ -5096,45 +5784,21 @@
                 </a:solidFill>
                 <a:latin typeface="Calibri"/>
               </a:rPr>
-              <a:t>Sort by Fiedler value</a:t>
-            </a:r>
-          </a:p>
-        </p:txBody>
-      </p:sp>
-      <p:pic>
-        <p:nvPicPr>
-          <p:cNvPr id="3" name="Picture 2" descr="02-fiedler-order.png"/>
-          <p:cNvPicPr>
-            <a:picLocks noChangeAspect="1"/>
-          </p:cNvPicPr>
-          <p:nvPr/>
-        </p:nvPicPr>
-        <p:blipFill>
-          <a:blip r:embed="rId2"/>
-          <a:stretch>
-            <a:fillRect/>
-          </a:stretch>
-        </p:blipFill>
-        <p:spPr>
-          <a:xfrm>
-            <a:off x="548640" y="1143000"/>
-            <a:ext cx="9404113" cy="4572000"/>
-          </a:xfrm>
-          <a:prstGeom prst="rect">
-            <a:avLst/>
-          </a:prstGeom>
-        </p:spPr>
-      </p:pic>
-      <p:sp>
-        <p:nvSpPr>
-          <p:cNvPr id="4" name="TextBox 3"/>
+              <a:t>Algorithm sketch</a:t>
+            </a:r>
+          </a:p>
+        </p:txBody>
+      </p:sp>
+      <p:sp>
+        <p:nvSpPr>
+          <p:cNvPr id="3" name="TextBox 2"/>
           <p:cNvSpPr txBox="1"/>
           <p:nvPr/>
         </p:nvSpPr>
         <p:spPr>
           <a:xfrm>
-            <a:off x="548640" y="5897880"/>
-            <a:ext cx="11064240" cy="411480"/>
+            <a:off x="548640" y="1234440"/>
+            <a:ext cx="11064240" cy="4937760"/>
           </a:xfrm>
           <a:prstGeom prst="rect">
             <a:avLst/>
@@ -5147,26 +5811,32 @@
           </a:bodyPr>
           <a:lstStyle/>
           <a:p>
-            <a:pPr>
+            <a:pPr lvl="0" marL="457200" indent="-228600">
+              <a:buFont typeface="Calibri"/>
+              <a:spcAft>
+                <a:spcPts val="1000"/>
+              </a:spcAft>
+              <a:buSzPct val="100000"/>
+              <a:buChar char="•"/>
               <a:lnSpc>
                 <a:spcPts val="2200"/>
               </a:lnSpc>
             </a:pPr>
             <a:r>
-              <a:rPr sz="1200" b="0">
+              <a:rPr sz="2000" b="0">
                 <a:solidFill>
                   <a:srgbClr val="333333"/>
                 </a:solidFill>
                 <a:latin typeface="Calibri"/>
               </a:rPr>
-              <a:t>Sort by Fiedler value</a:t>
-            </a:r>
-          </a:p>
-        </p:txBody>
-      </p:sp>
-      <p:sp>
-        <p:nvSpPr>
-          <p:cNvPr id="5" name="TextBox 4"/>
+              <a:t>On the starter graph the winning split is D E versus A B C with cutsize three</a:t>
+            </a:r>
+          </a:p>
+        </p:txBody>
+      </p:sp>
+      <p:sp>
+        <p:nvSpPr>
+          <p:cNvPr id="4" name="TextBox 3"/>
           <p:cNvSpPr txBox="1"/>
           <p:nvPr/>
         </p:nvSpPr>
@@ -5255,50 +5925,28 @@
                 </a:solidFill>
                 <a:latin typeface="Calibri"/>
               </a:rPr>
-              <a:t>Sweep prefixes for best cut</a:t>
-            </a:r>
-          </a:p>
-        </p:txBody>
-      </p:sp>
-      <p:pic>
-        <p:nvPicPr>
-          <p:cNvPr id="3" name="Picture 2" descr="03-sweep-cut.png"/>
-          <p:cNvPicPr>
-            <a:picLocks noChangeAspect="1"/>
-          </p:cNvPicPr>
+              <a:t>Algorithm sketch — try these</a:t>
+            </a:r>
+          </a:p>
+        </p:txBody>
+      </p:sp>
+      <p:sp>
+        <p:nvSpPr>
+          <p:cNvPr id="3" name="TextBox 2"/>
+          <p:cNvSpPr txBox="1"/>
           <p:nvPr/>
-        </p:nvPicPr>
-        <p:blipFill>
-          <a:blip r:embed="rId2"/>
-          <a:stretch>
-            <a:fillRect/>
-          </a:stretch>
-        </p:blipFill>
+        </p:nvSpPr>
         <p:spPr>
           <a:xfrm>
             <a:off x="548640" y="1143000"/>
-            <a:ext cx="9404113" cy="4572000"/>
+            <a:ext cx="11064240" cy="5029200"/>
           </a:xfrm>
           <a:prstGeom prst="rect">
             <a:avLst/>
           </a:prstGeom>
-        </p:spPr>
-      </p:pic>
-      <p:sp>
-        <p:nvSpPr>
-          <p:cNvPr id="4" name="TextBox 3"/>
-          <p:cNvSpPr txBox="1"/>
-          <p:nvPr/>
-        </p:nvSpPr>
-        <p:spPr>
-          <a:xfrm>
-            <a:off x="548640" y="5897880"/>
-            <a:ext cx="11064240" cy="411480"/>
-          </a:xfrm>
-          <a:prstGeom prst="rect">
-            <a:avLst/>
-          </a:prstGeom>
-          <a:noFill/>
+          <a:solidFill>
+            <a:srgbClr val="F4F4F4"/>
+          </a:solidFill>
         </p:spPr>
         <p:txBody>
           <a:bodyPr wrap="square">
@@ -5310,22 +5958,120 @@
               <a:lnSpc>
                 <a:spcPts val="2200"/>
               </a:lnSpc>
+              <a:spcAft>
+                <a:spcPts val="400"/>
+              </a:spcAft>
             </a:pPr>
             <a:r>
-              <a:rPr sz="1200" b="0">
+              <a:rPr sz="2000" b="0">
                 <a:solidFill>
                   <a:srgbClr val="333333"/>
                 </a:solidFill>
-                <a:latin typeface="Calibri"/>
+                <a:latin typeface="Consolas"/>
               </a:rPr>
-              <a:t>Sweep prefixes for best cut</a:t>
-            </a:r>
-          </a:p>
-        </p:txBody>
-      </p:sp>
-      <p:sp>
-        <p:nvSpPr>
-          <p:cNvPr id="5" name="TextBox 4"/>
+              <a:t>INPUT: weighted undirected G</a:t>
+            </a:r>
+          </a:p>
+          <a:p>
+            <a:pPr>
+              <a:lnSpc>
+                <a:spcPts val="2200"/>
+              </a:lnSpc>
+              <a:spcAft>
+                <a:spcPts val="400"/>
+              </a:spcAft>
+            </a:pPr>
+            <a:r>
+              <a:rPr sz="2000" b="0">
+                <a:solidFill>
+                  <a:srgbClr val="333333"/>
+                </a:solidFill>
+                <a:latin typeface="Consolas"/>
+              </a:rPr>
+              <a:t>OUTPUT: side[] bipartition</a:t>
+            </a:r>
+          </a:p>
+          <a:p>
+            <a:pPr>
+              <a:lnSpc>
+                <a:spcPts val="2200"/>
+              </a:lnSpc>
+              <a:spcAft>
+                <a:spcPts val="400"/>
+              </a:spcAft>
+            </a:pPr>
+            <a:r>
+              <a:rPr sz="2000" b="0">
+                <a:solidFill>
+                  <a:srgbClr val="333333"/>
+                </a:solidFill>
+                <a:latin typeface="Consolas"/>
+              </a:rPr>
+              <a:t>L ← Laplacian; take Fiedler eigenvector</a:t>
+            </a:r>
+          </a:p>
+          <a:p>
+            <a:pPr>
+              <a:lnSpc>
+                <a:spcPts val="2200"/>
+              </a:lnSpc>
+              <a:spcAft>
+                <a:spcPts val="400"/>
+              </a:spcAft>
+            </a:pPr>
+            <a:r>
+              <a:rPr sz="2000" b="0">
+                <a:solidFill>
+                  <a:srgbClr val="333333"/>
+                </a:solidFill>
+                <a:latin typeface="Consolas"/>
+              </a:rPr>
+              <a:t>order ← nodes sorted by Fiedler value</a:t>
+            </a:r>
+          </a:p>
+          <a:p>
+            <a:pPr>
+              <a:lnSpc>
+                <a:spcPts val="2200"/>
+              </a:lnSpc>
+              <a:spcAft>
+                <a:spcPts val="400"/>
+              </a:spcAft>
+            </a:pPr>
+            <a:r>
+              <a:rPr sz="2000" b="0">
+                <a:solidFill>
+                  <a:srgbClr val="333333"/>
+                </a:solidFill>
+                <a:latin typeface="Consolas"/>
+              </a:rPr>
+              <a:t>sweep balanced prefixes; pick min cutsize</a:t>
+            </a:r>
+          </a:p>
+          <a:p>
+            <a:pPr>
+              <a:lnSpc>
+                <a:spcPts val="2200"/>
+              </a:lnSpc>
+              <a:spcAft>
+                <a:spcPts val="400"/>
+              </a:spcAft>
+            </a:pPr>
+            <a:r>
+              <a:rPr sz="2000" b="0">
+                <a:solidFill>
+                  <a:srgbClr val="333333"/>
+                </a:solidFill>
+                <a:latin typeface="Consolas"/>
+              </a:rPr>
+              <a:t>GOLDEN: DE|ABC (or ABC|DE) cut=3</a:t>
+            </a:r>
+          </a:p>
+        </p:txBody>
+      </p:sp>
+      <p:sp>
+        <p:nvSpPr>
+          <p:cNvPr id="4" name="TextBox 3"/>
           <p:cNvSpPr txBox="1"/>
           <p:nvPr/>
         </p:nvSpPr>
@@ -5414,14 +6160,14 @@
                 </a:solidFill>
                 <a:latin typeface="Calibri"/>
               </a:rPr>
-              <a:t>Result ABC|DE</a:t>
+              <a:t>Build the Laplacian</a:t>
             </a:r>
           </a:p>
         </p:txBody>
       </p:sp>
       <p:pic>
         <p:nvPicPr>
-          <p:cNvPr id="3" name="Picture 2" descr="04-final.png"/>
+          <p:cNvPr id="3" name="Picture 2" descr="01-laplacian.png"/>
           <p:cNvPicPr>
             <a:picLocks noChangeAspect="1"/>
           </p:cNvPicPr>
@@ -5477,7 +6223,7 @@
                 </a:solidFill>
                 <a:latin typeface="Calibri"/>
               </a:rPr>
-              <a:t>Result ABC|DE</a:t>
+              <a:t>Build the Laplacian</a:t>
             </a:r>
           </a:p>
         </p:txBody>
@@ -5573,14 +6319,14 @@
                 </a:solidFill>
                 <a:latin typeface="Calibri"/>
               </a:rPr>
-              <a:t>When spectral helps</a:t>
+              <a:t>Sort by Fiedler value</a:t>
             </a:r>
           </a:p>
         </p:txBody>
       </p:sp>
       <p:pic>
         <p:nvPicPr>
-          <p:cNvPr id="3" name="Picture 2" descr="05-takeaway.png"/>
+          <p:cNvPr id="3" name="Picture 2" descr="02-fiedler-order.png"/>
           <p:cNvPicPr>
             <a:picLocks noChangeAspect="1"/>
           </p:cNvPicPr>
@@ -5636,7 +6382,7 @@
                 </a:solidFill>
                 <a:latin typeface="Calibri"/>
               </a:rPr>
-              <a:t>When spectral helps</a:t>
+              <a:t>Sort by Fiedler value</a:t>
             </a:r>
           </a:p>
         </p:txBody>
@@ -5732,21 +6478,45 @@
                 </a:solidFill>
                 <a:latin typeface="Calibri"/>
               </a:rPr>
-              <a:t>Browser lab track</a:t>
-            </a:r>
-          </a:p>
-        </p:txBody>
-      </p:sp>
-      <p:sp>
-        <p:nvSpPr>
-          <p:cNvPr id="3" name="TextBox 2"/>
+              <a:t>Sweep prefixes for best cut</a:t>
+            </a:r>
+          </a:p>
+        </p:txBody>
+      </p:sp>
+      <p:pic>
+        <p:nvPicPr>
+          <p:cNvPr id="3" name="Picture 2" descr="03-sweep-cut.png"/>
+          <p:cNvPicPr>
+            <a:picLocks noChangeAspect="1"/>
+          </p:cNvPicPr>
+          <p:nvPr/>
+        </p:nvPicPr>
+        <p:blipFill>
+          <a:blip r:embed="rId2"/>
+          <a:stretch>
+            <a:fillRect/>
+          </a:stretch>
+        </p:blipFill>
+        <p:spPr>
+          <a:xfrm>
+            <a:off x="548640" y="1143000"/>
+            <a:ext cx="9404113" cy="4572000"/>
+          </a:xfrm>
+          <a:prstGeom prst="rect">
+            <a:avLst/>
+          </a:prstGeom>
+        </p:spPr>
+      </p:pic>
+      <p:sp>
+        <p:nvSpPr>
+          <p:cNvPr id="4" name="TextBox 3"/>
           <p:cNvSpPr txBox="1"/>
           <p:nvPr/>
         </p:nvSpPr>
         <p:spPr>
           <a:xfrm>
-            <a:off x="548640" y="1234440"/>
-            <a:ext cx="11064240" cy="4937760"/>
+            <a:off x="548640" y="5897880"/>
+            <a:ext cx="11064240" cy="411480"/>
           </a:xfrm>
           <a:prstGeom prst="rect">
             <a:avLst/>
@@ -5759,94 +6529,26 @@
           </a:bodyPr>
           <a:lstStyle/>
           <a:p>
-            <a:pPr lvl="0" marL="457200" indent="-228600">
-              <a:buFont typeface="Calibri"/>
-              <a:spcAft>
-                <a:spcPts val="1000"/>
-              </a:spcAft>
-              <a:buSzPct val="100000"/>
-              <a:buChar char="•"/>
+            <a:pPr>
               <a:lnSpc>
                 <a:spcPts val="2200"/>
               </a:lnSpc>
             </a:pPr>
             <a:r>
-              <a:rPr sz="2000" b="0">
+              <a:rPr sz="1200" b="0">
                 <a:solidFill>
                   <a:srgbClr val="333333"/>
                 </a:solidFill>
                 <a:latin typeface="Calibri"/>
               </a:rPr>
-              <a:t>In the browser lab track, open the </a:t>
-            </a:r>
-            <a:r>
-              <a:rPr sz="2000" b="1">
-                <a:solidFill>
-                  <a:srgbClr val="333333"/>
-                </a:solidFill>
-                <a:latin typeface="Calibri"/>
-              </a:rPr>
-              <a:t>spectral-partition</a:t>
-            </a:r>
-            <a:r>
-              <a:rPr sz="2000" b="0">
-                <a:solidFill>
-                  <a:srgbClr val="333333"/>
-                </a:solidFill>
-                <a:latin typeface="Calibri"/>
-              </a:rPr>
-              <a:t> lab from the tools shelf</a:t>
-            </a:r>
-          </a:p>
-          <a:p>
-            <a:pPr lvl="0" marL="457200" indent="-228600">
-              <a:buFont typeface="Calibri"/>
-              <a:spcAft>
-                <a:spcPts val="1000"/>
-              </a:spcAft>
-              <a:buSzPct val="100000"/>
-              <a:buChar char="•"/>
-              <a:lnSpc>
-                <a:spcPts val="2200"/>
-              </a:lnSpc>
-            </a:pPr>
-            <a:r>
-              <a:rPr sz="2000" b="0">
-                <a:solidFill>
-                  <a:srgbClr val="333333"/>
-                </a:solidFill>
-                <a:latin typeface="Calibri"/>
-              </a:rPr>
-              <a:t>Load the starter graph, run the algorithm once</a:t>
-            </a:r>
-          </a:p>
-          <a:p>
-            <a:pPr lvl="0" marL="457200" indent="-228600">
-              <a:buFont typeface="Calibri"/>
-              <a:spcAft>
-                <a:spcPts val="1000"/>
-              </a:spcAft>
-              <a:buSzPct val="100000"/>
-              <a:buChar char="•"/>
-              <a:lnSpc>
-                <a:spcPts val="2200"/>
-              </a:lnSpc>
-            </a:pPr>
-            <a:r>
-              <a:rPr sz="2000" b="0">
-                <a:solidFill>
-                  <a:srgbClr val="333333"/>
-                </a:solidFill>
-                <a:latin typeface="Calibri"/>
-              </a:rPr>
-              <a:t>Work the challenges that lock the goldens</a:t>
-            </a:r>
-          </a:p>
-        </p:txBody>
-      </p:sp>
-      <p:sp>
-        <p:nvSpPr>
-          <p:cNvPr id="4" name="TextBox 3"/>
+              <a:t>Sweep prefixes for best cut</a:t>
+            </a:r>
+          </a:p>
+        </p:txBody>
+      </p:sp>
+      <p:sp>
+        <p:nvSpPr>
+          <p:cNvPr id="5" name="TextBox 4"/>
           <p:cNvSpPr txBox="1"/>
           <p:nvPr/>
         </p:nvSpPr>
@@ -5935,21 +6637,45 @@
                 </a:solidFill>
                 <a:latin typeface="Calibri"/>
               </a:rPr>
-              <a:t>Implement track</a:t>
-            </a:r>
-          </a:p>
-        </p:txBody>
-      </p:sp>
-      <p:sp>
-        <p:nvSpPr>
-          <p:cNvPr id="3" name="TextBox 2"/>
+              <a:t>Result ABC|DE</a:t>
+            </a:r>
+          </a:p>
+        </p:txBody>
+      </p:sp>
+      <p:pic>
+        <p:nvPicPr>
+          <p:cNvPr id="3" name="Picture 2" descr="04-final.png"/>
+          <p:cNvPicPr>
+            <a:picLocks noChangeAspect="1"/>
+          </p:cNvPicPr>
+          <p:nvPr/>
+        </p:nvPicPr>
+        <p:blipFill>
+          <a:blip r:embed="rId2"/>
+          <a:stretch>
+            <a:fillRect/>
+          </a:stretch>
+        </p:blipFill>
+        <p:spPr>
+          <a:xfrm>
+            <a:off x="548640" y="1143000"/>
+            <a:ext cx="9404113" cy="4572000"/>
+          </a:xfrm>
+          <a:prstGeom prst="rect">
+            <a:avLst/>
+          </a:prstGeom>
+        </p:spPr>
+      </p:pic>
+      <p:sp>
+        <p:nvSpPr>
+          <p:cNvPr id="4" name="TextBox 3"/>
           <p:cNvSpPr txBox="1"/>
           <p:nvPr/>
         </p:nvSpPr>
         <p:spPr>
           <a:xfrm>
-            <a:off x="548640" y="1234440"/>
-            <a:ext cx="11064240" cy="4937760"/>
+            <a:off x="548640" y="5897880"/>
+            <a:ext cx="11064240" cy="411480"/>
           </a:xfrm>
           <a:prstGeom prst="rect">
             <a:avLst/>
@@ -5962,76 +6688,26 @@
           </a:bodyPr>
           <a:lstStyle/>
           <a:p>
-            <a:pPr lvl="0" marL="457200" indent="-228600">
-              <a:buFont typeface="Calibri"/>
-              <a:spcAft>
-                <a:spcPts val="1000"/>
-              </a:spcAft>
-              <a:buSzPct val="100000"/>
-              <a:buChar char="•"/>
+            <a:pPr>
               <a:lnSpc>
                 <a:spcPts val="2200"/>
               </a:lnSpc>
             </a:pPr>
             <a:r>
-              <a:rPr sz="2000" b="0">
+              <a:rPr sz="1200" b="0">
                 <a:solidFill>
                   <a:srgbClr val="333333"/>
                 </a:solidFill>
                 <a:latin typeface="Calibri"/>
               </a:rPr>
-              <a:t>In the implement track, open this module’s examples and the course `common/` solvers</a:t>
-            </a:r>
-          </a:p>
-          <a:p>
-            <a:pPr lvl="0" marL="457200" indent="-228600">
-              <a:buFont typeface="Calibri"/>
-              <a:spcAft>
-                <a:spcPts val="1000"/>
-              </a:spcAft>
-              <a:buSzPct val="100000"/>
-              <a:buChar char="•"/>
-              <a:lnSpc>
-                <a:spcPts val="2200"/>
-              </a:lnSpc>
-            </a:pPr>
-            <a:r>
-              <a:rPr sz="2000" b="0">
-                <a:solidFill>
-                  <a:srgbClr val="333333"/>
-                </a:solidFill>
-                <a:latin typeface="Calibri"/>
-              </a:rPr>
-              <a:t>Parse the tiny graph, run the algorithm with a deterministic seed</a:t>
-            </a:r>
-          </a:p>
-          <a:p>
-            <a:pPr lvl="0" marL="457200" indent="-228600">
-              <a:buFont typeface="Calibri"/>
-              <a:spcAft>
-                <a:spcPts val="1000"/>
-              </a:spcAft>
-              <a:buSzPct val="100000"/>
-              <a:buChar char="•"/>
-              <a:lnSpc>
-                <a:spcPts val="2200"/>
-              </a:lnSpc>
-            </a:pPr>
-            <a:r>
-              <a:rPr sz="2000" b="0">
-                <a:solidFill>
-                  <a:srgbClr val="333333"/>
-                </a:solidFill>
-                <a:latin typeface="Calibri"/>
-              </a:rPr>
-              <a:t>Match the browser goldens before you claim the checklist</a:t>
-            </a:r>
-          </a:p>
-        </p:txBody>
-      </p:sp>
-      <p:sp>
-        <p:nvSpPr>
-          <p:cNvPr id="4" name="TextBox 3"/>
+              <a:t>Result ABC|DE</a:t>
+            </a:r>
+          </a:p>
+        </p:txBody>
+      </p:sp>
+      <p:sp>
+        <p:nvSpPr>
+          <p:cNvPr id="5" name="TextBox 4"/>
           <p:cNvSpPr txBox="1"/>
           <p:nvPr/>
         </p:nvSpPr>
